--- a/examples/ppt169_顶级咨询风_构建有效AI代理_Anthropic/ppt169_顶级咨询风_构建有效AI代理_Anthropic.pptx
+++ b/examples/ppt169_顶级咨询风_构建有效AI代理_Anthropic/ppt169_顶级咨询风_构建有效AI代理_Anthropic.pptx
@@ -119,6 +119,846 @@
     </a:lvl9pPr>
   </p:defaultTextStyle>
 </p:presentation>
+</file>
+
+<file path=ppt/notesSlides/notesSlide1.xml><?xml version="1.0" encoding="utf-8"?>
+<p:notes xmlns:a="http://schemas.openxmlformats.org/drawingml/2006/main" xmlns:r="http://schemas.openxmlformats.org/officeDocument/2006/relationships" xmlns:p="http://schemas.openxmlformats.org/presentationml/2006/main">
+  <p:cSld>
+    <p:spTree>
+      <p:nvGrpSpPr>
+        <p:cNvPr id="1" name=""/>
+        <p:cNvGrpSpPr/>
+        <p:nvPr/>
+      </p:nvGrpSpPr>
+      <p:grpSpPr>
+        <a:xfrm>
+          <a:off x="0" y="0"/>
+          <a:ext cx="0" cy="0"/>
+          <a:chOff x="0" y="0"/>
+          <a:chExt cx="0" cy="0"/>
+        </a:xfrm>
+      </p:grpSpPr>
+      <p:sp>
+        <p:nvSpPr>
+          <p:cNvPr id="2" name="Slide Image Placeholder 1"/>
+          <p:cNvSpPr>
+            <a:spLocks noGrp="1" noRot="1" noChangeAspect="1"/>
+          </p:cNvSpPr>
+          <p:nvPr>
+            <p:ph type="sldImg"/>
+          </p:nvPr>
+        </p:nvSpPr>
+        <p:spPr/>
+      </p:sp>
+      <p:sp>
+        <p:nvSpPr>
+          <p:cNvPr id="3" name="Notes Placeholder 2"/>
+          <p:cNvSpPr>
+            <a:spLocks noGrp="1"/>
+          </p:cNvSpPr>
+          <p:nvPr>
+            <p:ph type="body" idx="1"/>
+          </p:nvPr>
+        </p:nvSpPr>
+        <p:spPr/>
+        <p:txBody>
+          <a:bodyPr/>
+          <a:lstStyle/>
+          <a:p>
+            <a:endParaRPr lang="zh-CN" dirty="0"/>
+          </a:p>
+        </p:txBody>
+      </p:sp>
+    </p:spTree>
+  </p:cSld>
+  <p:clrMapOvr>
+    <a:masterClrMapping/>
+  </p:clrMapOvr>
+</p:notes>
+</file>
+
+<file path=ppt/notesSlides/notesSlide10.xml><?xml version="1.0" encoding="utf-8"?>
+<p:notes xmlns:a="http://schemas.openxmlformats.org/drawingml/2006/main" xmlns:r="http://schemas.openxmlformats.org/officeDocument/2006/relationships" xmlns:p="http://schemas.openxmlformats.org/presentationml/2006/main">
+  <p:cSld>
+    <p:spTree>
+      <p:nvGrpSpPr>
+        <p:cNvPr id="1" name=""/>
+        <p:cNvGrpSpPr/>
+        <p:nvPr/>
+      </p:nvGrpSpPr>
+      <p:grpSpPr>
+        <a:xfrm>
+          <a:off x="0" y="0"/>
+          <a:ext cx="0" cy="0"/>
+          <a:chOff x="0" y="0"/>
+          <a:chExt cx="0" cy="0"/>
+        </a:xfrm>
+      </p:grpSpPr>
+      <p:sp>
+        <p:nvSpPr>
+          <p:cNvPr id="2" name="Slide Image Placeholder 1"/>
+          <p:cNvSpPr>
+            <a:spLocks noGrp="1" noRot="1" noChangeAspect="1"/>
+          </p:cNvSpPr>
+          <p:nvPr>
+            <p:ph type="sldImg"/>
+          </p:nvPr>
+        </p:nvSpPr>
+        <p:spPr/>
+      </p:sp>
+      <p:sp>
+        <p:nvSpPr>
+          <p:cNvPr id="3" name="Notes Placeholder 2"/>
+          <p:cNvSpPr>
+            <a:spLocks noGrp="1"/>
+          </p:cNvSpPr>
+          <p:nvPr>
+            <p:ph type="body" idx="1"/>
+          </p:nvPr>
+        </p:nvSpPr>
+        <p:spPr/>
+        <p:txBody>
+          <a:bodyPr/>
+          <a:lstStyle/>
+          <a:p>
+            <a:endParaRPr lang="zh-CN" dirty="0"/>
+          </a:p>
+        </p:txBody>
+      </p:sp>
+    </p:spTree>
+  </p:cSld>
+  <p:clrMapOvr>
+    <a:masterClrMapping/>
+  </p:clrMapOvr>
+</p:notes>
+</file>
+
+<file path=ppt/notesSlides/notesSlide11.xml><?xml version="1.0" encoding="utf-8"?>
+<p:notes xmlns:a="http://schemas.openxmlformats.org/drawingml/2006/main" xmlns:r="http://schemas.openxmlformats.org/officeDocument/2006/relationships" xmlns:p="http://schemas.openxmlformats.org/presentationml/2006/main">
+  <p:cSld>
+    <p:spTree>
+      <p:nvGrpSpPr>
+        <p:cNvPr id="1" name=""/>
+        <p:cNvGrpSpPr/>
+        <p:nvPr/>
+      </p:nvGrpSpPr>
+      <p:grpSpPr>
+        <a:xfrm>
+          <a:off x="0" y="0"/>
+          <a:ext cx="0" cy="0"/>
+          <a:chOff x="0" y="0"/>
+          <a:chExt cx="0" cy="0"/>
+        </a:xfrm>
+      </p:grpSpPr>
+      <p:sp>
+        <p:nvSpPr>
+          <p:cNvPr id="2" name="Slide Image Placeholder 1"/>
+          <p:cNvSpPr>
+            <a:spLocks noGrp="1" noRot="1" noChangeAspect="1"/>
+          </p:cNvSpPr>
+          <p:nvPr>
+            <p:ph type="sldImg"/>
+          </p:nvPr>
+        </p:nvSpPr>
+        <p:spPr/>
+      </p:sp>
+      <p:sp>
+        <p:nvSpPr>
+          <p:cNvPr id="3" name="Notes Placeholder 2"/>
+          <p:cNvSpPr>
+            <a:spLocks noGrp="1"/>
+          </p:cNvSpPr>
+          <p:nvPr>
+            <p:ph type="body" idx="1"/>
+          </p:nvPr>
+        </p:nvSpPr>
+        <p:spPr/>
+        <p:txBody>
+          <a:bodyPr/>
+          <a:lstStyle/>
+          <a:p>
+            <a:endParaRPr lang="zh-CN" dirty="0"/>
+          </a:p>
+        </p:txBody>
+      </p:sp>
+    </p:spTree>
+  </p:cSld>
+  <p:clrMapOvr>
+    <a:masterClrMapping/>
+  </p:clrMapOvr>
+</p:notes>
+</file>
+
+<file path=ppt/notesSlides/notesSlide12.xml><?xml version="1.0" encoding="utf-8"?>
+<p:notes xmlns:a="http://schemas.openxmlformats.org/drawingml/2006/main" xmlns:r="http://schemas.openxmlformats.org/officeDocument/2006/relationships" xmlns:p="http://schemas.openxmlformats.org/presentationml/2006/main">
+  <p:cSld>
+    <p:spTree>
+      <p:nvGrpSpPr>
+        <p:cNvPr id="1" name=""/>
+        <p:cNvGrpSpPr/>
+        <p:nvPr/>
+      </p:nvGrpSpPr>
+      <p:grpSpPr>
+        <a:xfrm>
+          <a:off x="0" y="0"/>
+          <a:ext cx="0" cy="0"/>
+          <a:chOff x="0" y="0"/>
+          <a:chExt cx="0" cy="0"/>
+        </a:xfrm>
+      </p:grpSpPr>
+      <p:sp>
+        <p:nvSpPr>
+          <p:cNvPr id="2" name="Slide Image Placeholder 1"/>
+          <p:cNvSpPr>
+            <a:spLocks noGrp="1" noRot="1" noChangeAspect="1"/>
+          </p:cNvSpPr>
+          <p:nvPr>
+            <p:ph type="sldImg"/>
+          </p:nvPr>
+        </p:nvSpPr>
+        <p:spPr/>
+      </p:sp>
+      <p:sp>
+        <p:nvSpPr>
+          <p:cNvPr id="3" name="Notes Placeholder 2"/>
+          <p:cNvSpPr>
+            <a:spLocks noGrp="1"/>
+          </p:cNvSpPr>
+          <p:nvPr>
+            <p:ph type="body" idx="1"/>
+          </p:nvPr>
+        </p:nvSpPr>
+        <p:spPr/>
+        <p:txBody>
+          <a:bodyPr/>
+          <a:lstStyle/>
+          <a:p>
+            <a:endParaRPr lang="zh-CN" dirty="0"/>
+          </a:p>
+        </p:txBody>
+      </p:sp>
+    </p:spTree>
+  </p:cSld>
+  <p:clrMapOvr>
+    <a:masterClrMapping/>
+  </p:clrMapOvr>
+</p:notes>
+</file>
+
+<file path=ppt/notesSlides/notesSlide13.xml><?xml version="1.0" encoding="utf-8"?>
+<p:notes xmlns:a="http://schemas.openxmlformats.org/drawingml/2006/main" xmlns:r="http://schemas.openxmlformats.org/officeDocument/2006/relationships" xmlns:p="http://schemas.openxmlformats.org/presentationml/2006/main">
+  <p:cSld>
+    <p:spTree>
+      <p:nvGrpSpPr>
+        <p:cNvPr id="1" name=""/>
+        <p:cNvGrpSpPr/>
+        <p:nvPr/>
+      </p:nvGrpSpPr>
+      <p:grpSpPr>
+        <a:xfrm>
+          <a:off x="0" y="0"/>
+          <a:ext cx="0" cy="0"/>
+          <a:chOff x="0" y="0"/>
+          <a:chExt cx="0" cy="0"/>
+        </a:xfrm>
+      </p:grpSpPr>
+      <p:sp>
+        <p:nvSpPr>
+          <p:cNvPr id="2" name="Slide Image Placeholder 1"/>
+          <p:cNvSpPr>
+            <a:spLocks noGrp="1" noRot="1" noChangeAspect="1"/>
+          </p:cNvSpPr>
+          <p:nvPr>
+            <p:ph type="sldImg"/>
+          </p:nvPr>
+        </p:nvSpPr>
+        <p:spPr/>
+      </p:sp>
+      <p:sp>
+        <p:nvSpPr>
+          <p:cNvPr id="3" name="Notes Placeholder 2"/>
+          <p:cNvSpPr>
+            <a:spLocks noGrp="1"/>
+          </p:cNvSpPr>
+          <p:nvPr>
+            <p:ph type="body" idx="1"/>
+          </p:nvPr>
+        </p:nvSpPr>
+        <p:spPr/>
+        <p:txBody>
+          <a:bodyPr/>
+          <a:lstStyle/>
+          <a:p>
+            <a:endParaRPr lang="zh-CN" dirty="0"/>
+          </a:p>
+        </p:txBody>
+      </p:sp>
+    </p:spTree>
+  </p:cSld>
+  <p:clrMapOvr>
+    <a:masterClrMapping/>
+  </p:clrMapOvr>
+</p:notes>
+</file>
+
+<file path=ppt/notesSlides/notesSlide14.xml><?xml version="1.0" encoding="utf-8"?>
+<p:notes xmlns:a="http://schemas.openxmlformats.org/drawingml/2006/main" xmlns:r="http://schemas.openxmlformats.org/officeDocument/2006/relationships" xmlns:p="http://schemas.openxmlformats.org/presentationml/2006/main">
+  <p:cSld>
+    <p:spTree>
+      <p:nvGrpSpPr>
+        <p:cNvPr id="1" name=""/>
+        <p:cNvGrpSpPr/>
+        <p:nvPr/>
+      </p:nvGrpSpPr>
+      <p:grpSpPr>
+        <a:xfrm>
+          <a:off x="0" y="0"/>
+          <a:ext cx="0" cy="0"/>
+          <a:chOff x="0" y="0"/>
+          <a:chExt cx="0" cy="0"/>
+        </a:xfrm>
+      </p:grpSpPr>
+      <p:sp>
+        <p:nvSpPr>
+          <p:cNvPr id="2" name="Slide Image Placeholder 1"/>
+          <p:cNvSpPr>
+            <a:spLocks noGrp="1" noRot="1" noChangeAspect="1"/>
+          </p:cNvSpPr>
+          <p:nvPr>
+            <p:ph type="sldImg"/>
+          </p:nvPr>
+        </p:nvSpPr>
+        <p:spPr/>
+      </p:sp>
+      <p:sp>
+        <p:nvSpPr>
+          <p:cNvPr id="3" name="Notes Placeholder 2"/>
+          <p:cNvSpPr>
+            <a:spLocks noGrp="1"/>
+          </p:cNvSpPr>
+          <p:nvPr>
+            <p:ph type="body" idx="1"/>
+          </p:nvPr>
+        </p:nvSpPr>
+        <p:spPr/>
+        <p:txBody>
+          <a:bodyPr/>
+          <a:lstStyle/>
+          <a:p>
+            <a:endParaRPr lang="zh-CN" dirty="0"/>
+          </a:p>
+        </p:txBody>
+      </p:sp>
+    </p:spTree>
+  </p:cSld>
+  <p:clrMapOvr>
+    <a:masterClrMapping/>
+  </p:clrMapOvr>
+</p:notes>
+</file>
+
+<file path=ppt/notesSlides/notesSlide15.xml><?xml version="1.0" encoding="utf-8"?>
+<p:notes xmlns:a="http://schemas.openxmlformats.org/drawingml/2006/main" xmlns:r="http://schemas.openxmlformats.org/officeDocument/2006/relationships" xmlns:p="http://schemas.openxmlformats.org/presentationml/2006/main">
+  <p:cSld>
+    <p:spTree>
+      <p:nvGrpSpPr>
+        <p:cNvPr id="1" name=""/>
+        <p:cNvGrpSpPr/>
+        <p:nvPr/>
+      </p:nvGrpSpPr>
+      <p:grpSpPr>
+        <a:xfrm>
+          <a:off x="0" y="0"/>
+          <a:ext cx="0" cy="0"/>
+          <a:chOff x="0" y="0"/>
+          <a:chExt cx="0" cy="0"/>
+        </a:xfrm>
+      </p:grpSpPr>
+      <p:sp>
+        <p:nvSpPr>
+          <p:cNvPr id="2" name="Slide Image Placeholder 1"/>
+          <p:cNvSpPr>
+            <a:spLocks noGrp="1" noRot="1" noChangeAspect="1"/>
+          </p:cNvSpPr>
+          <p:nvPr>
+            <p:ph type="sldImg"/>
+          </p:nvPr>
+        </p:nvSpPr>
+        <p:spPr/>
+      </p:sp>
+      <p:sp>
+        <p:nvSpPr>
+          <p:cNvPr id="3" name="Notes Placeholder 2"/>
+          <p:cNvSpPr>
+            <a:spLocks noGrp="1"/>
+          </p:cNvSpPr>
+          <p:nvPr>
+            <p:ph type="body" idx="1"/>
+          </p:nvPr>
+        </p:nvSpPr>
+        <p:spPr/>
+        <p:txBody>
+          <a:bodyPr/>
+          <a:lstStyle/>
+          <a:p>
+            <a:endParaRPr lang="zh-CN" dirty="0"/>
+          </a:p>
+        </p:txBody>
+      </p:sp>
+    </p:spTree>
+  </p:cSld>
+  <p:clrMapOvr>
+    <a:masterClrMapping/>
+  </p:clrMapOvr>
+</p:notes>
+</file>
+
+<file path=ppt/notesSlides/notesSlide2.xml><?xml version="1.0" encoding="utf-8"?>
+<p:notes xmlns:a="http://schemas.openxmlformats.org/drawingml/2006/main" xmlns:r="http://schemas.openxmlformats.org/officeDocument/2006/relationships" xmlns:p="http://schemas.openxmlformats.org/presentationml/2006/main">
+  <p:cSld>
+    <p:spTree>
+      <p:nvGrpSpPr>
+        <p:cNvPr id="1" name=""/>
+        <p:cNvGrpSpPr/>
+        <p:nvPr/>
+      </p:nvGrpSpPr>
+      <p:grpSpPr>
+        <a:xfrm>
+          <a:off x="0" y="0"/>
+          <a:ext cx="0" cy="0"/>
+          <a:chOff x="0" y="0"/>
+          <a:chExt cx="0" cy="0"/>
+        </a:xfrm>
+      </p:grpSpPr>
+      <p:sp>
+        <p:nvSpPr>
+          <p:cNvPr id="2" name="Slide Image Placeholder 1"/>
+          <p:cNvSpPr>
+            <a:spLocks noGrp="1" noRot="1" noChangeAspect="1"/>
+          </p:cNvSpPr>
+          <p:nvPr>
+            <p:ph type="sldImg"/>
+          </p:nvPr>
+        </p:nvSpPr>
+        <p:spPr/>
+      </p:sp>
+      <p:sp>
+        <p:nvSpPr>
+          <p:cNvPr id="3" name="Notes Placeholder 2"/>
+          <p:cNvSpPr>
+            <a:spLocks noGrp="1"/>
+          </p:cNvSpPr>
+          <p:nvPr>
+            <p:ph type="body" idx="1"/>
+          </p:nvPr>
+        </p:nvSpPr>
+        <p:spPr/>
+        <p:txBody>
+          <a:bodyPr/>
+          <a:lstStyle/>
+          <a:p>
+            <a:endParaRPr lang="zh-CN" dirty="0"/>
+          </a:p>
+        </p:txBody>
+      </p:sp>
+    </p:spTree>
+  </p:cSld>
+  <p:clrMapOvr>
+    <a:masterClrMapping/>
+  </p:clrMapOvr>
+</p:notes>
+</file>
+
+<file path=ppt/notesSlides/notesSlide3.xml><?xml version="1.0" encoding="utf-8"?>
+<p:notes xmlns:a="http://schemas.openxmlformats.org/drawingml/2006/main" xmlns:r="http://schemas.openxmlformats.org/officeDocument/2006/relationships" xmlns:p="http://schemas.openxmlformats.org/presentationml/2006/main">
+  <p:cSld>
+    <p:spTree>
+      <p:nvGrpSpPr>
+        <p:cNvPr id="1" name=""/>
+        <p:cNvGrpSpPr/>
+        <p:nvPr/>
+      </p:nvGrpSpPr>
+      <p:grpSpPr>
+        <a:xfrm>
+          <a:off x="0" y="0"/>
+          <a:ext cx="0" cy="0"/>
+          <a:chOff x="0" y="0"/>
+          <a:chExt cx="0" cy="0"/>
+        </a:xfrm>
+      </p:grpSpPr>
+      <p:sp>
+        <p:nvSpPr>
+          <p:cNvPr id="2" name="Slide Image Placeholder 1"/>
+          <p:cNvSpPr>
+            <a:spLocks noGrp="1" noRot="1" noChangeAspect="1"/>
+          </p:cNvSpPr>
+          <p:nvPr>
+            <p:ph type="sldImg"/>
+          </p:nvPr>
+        </p:nvSpPr>
+        <p:spPr/>
+      </p:sp>
+      <p:sp>
+        <p:nvSpPr>
+          <p:cNvPr id="3" name="Notes Placeholder 2"/>
+          <p:cNvSpPr>
+            <a:spLocks noGrp="1"/>
+          </p:cNvSpPr>
+          <p:nvPr>
+            <p:ph type="body" idx="1"/>
+          </p:nvPr>
+        </p:nvSpPr>
+        <p:spPr/>
+        <p:txBody>
+          <a:bodyPr/>
+          <a:lstStyle/>
+          <a:p>
+            <a:endParaRPr lang="zh-CN" dirty="0"/>
+          </a:p>
+        </p:txBody>
+      </p:sp>
+    </p:spTree>
+  </p:cSld>
+  <p:clrMapOvr>
+    <a:masterClrMapping/>
+  </p:clrMapOvr>
+</p:notes>
+</file>
+
+<file path=ppt/notesSlides/notesSlide4.xml><?xml version="1.0" encoding="utf-8"?>
+<p:notes xmlns:a="http://schemas.openxmlformats.org/drawingml/2006/main" xmlns:r="http://schemas.openxmlformats.org/officeDocument/2006/relationships" xmlns:p="http://schemas.openxmlformats.org/presentationml/2006/main">
+  <p:cSld>
+    <p:spTree>
+      <p:nvGrpSpPr>
+        <p:cNvPr id="1" name=""/>
+        <p:cNvGrpSpPr/>
+        <p:nvPr/>
+      </p:nvGrpSpPr>
+      <p:grpSpPr>
+        <a:xfrm>
+          <a:off x="0" y="0"/>
+          <a:ext cx="0" cy="0"/>
+          <a:chOff x="0" y="0"/>
+          <a:chExt cx="0" cy="0"/>
+        </a:xfrm>
+      </p:grpSpPr>
+      <p:sp>
+        <p:nvSpPr>
+          <p:cNvPr id="2" name="Slide Image Placeholder 1"/>
+          <p:cNvSpPr>
+            <a:spLocks noGrp="1" noRot="1" noChangeAspect="1"/>
+          </p:cNvSpPr>
+          <p:nvPr>
+            <p:ph type="sldImg"/>
+          </p:nvPr>
+        </p:nvSpPr>
+        <p:spPr/>
+      </p:sp>
+      <p:sp>
+        <p:nvSpPr>
+          <p:cNvPr id="3" name="Notes Placeholder 2"/>
+          <p:cNvSpPr>
+            <a:spLocks noGrp="1"/>
+          </p:cNvSpPr>
+          <p:nvPr>
+            <p:ph type="body" idx="1"/>
+          </p:nvPr>
+        </p:nvSpPr>
+        <p:spPr/>
+        <p:txBody>
+          <a:bodyPr/>
+          <a:lstStyle/>
+          <a:p>
+            <a:endParaRPr lang="zh-CN" dirty="0"/>
+          </a:p>
+        </p:txBody>
+      </p:sp>
+    </p:spTree>
+  </p:cSld>
+  <p:clrMapOvr>
+    <a:masterClrMapping/>
+  </p:clrMapOvr>
+</p:notes>
+</file>
+
+<file path=ppt/notesSlides/notesSlide5.xml><?xml version="1.0" encoding="utf-8"?>
+<p:notes xmlns:a="http://schemas.openxmlformats.org/drawingml/2006/main" xmlns:r="http://schemas.openxmlformats.org/officeDocument/2006/relationships" xmlns:p="http://schemas.openxmlformats.org/presentationml/2006/main">
+  <p:cSld>
+    <p:spTree>
+      <p:nvGrpSpPr>
+        <p:cNvPr id="1" name=""/>
+        <p:cNvGrpSpPr/>
+        <p:nvPr/>
+      </p:nvGrpSpPr>
+      <p:grpSpPr>
+        <a:xfrm>
+          <a:off x="0" y="0"/>
+          <a:ext cx="0" cy="0"/>
+          <a:chOff x="0" y="0"/>
+          <a:chExt cx="0" cy="0"/>
+        </a:xfrm>
+      </p:grpSpPr>
+      <p:sp>
+        <p:nvSpPr>
+          <p:cNvPr id="2" name="Slide Image Placeholder 1"/>
+          <p:cNvSpPr>
+            <a:spLocks noGrp="1" noRot="1" noChangeAspect="1"/>
+          </p:cNvSpPr>
+          <p:nvPr>
+            <p:ph type="sldImg"/>
+          </p:nvPr>
+        </p:nvSpPr>
+        <p:spPr/>
+      </p:sp>
+      <p:sp>
+        <p:nvSpPr>
+          <p:cNvPr id="3" name="Notes Placeholder 2"/>
+          <p:cNvSpPr>
+            <a:spLocks noGrp="1"/>
+          </p:cNvSpPr>
+          <p:nvPr>
+            <p:ph type="body" idx="1"/>
+          </p:nvPr>
+        </p:nvSpPr>
+        <p:spPr/>
+        <p:txBody>
+          <a:bodyPr/>
+          <a:lstStyle/>
+          <a:p>
+            <a:endParaRPr lang="zh-CN" dirty="0"/>
+          </a:p>
+        </p:txBody>
+      </p:sp>
+    </p:spTree>
+  </p:cSld>
+  <p:clrMapOvr>
+    <a:masterClrMapping/>
+  </p:clrMapOvr>
+</p:notes>
+</file>
+
+<file path=ppt/notesSlides/notesSlide6.xml><?xml version="1.0" encoding="utf-8"?>
+<p:notes xmlns:a="http://schemas.openxmlformats.org/drawingml/2006/main" xmlns:r="http://schemas.openxmlformats.org/officeDocument/2006/relationships" xmlns:p="http://schemas.openxmlformats.org/presentationml/2006/main">
+  <p:cSld>
+    <p:spTree>
+      <p:nvGrpSpPr>
+        <p:cNvPr id="1" name=""/>
+        <p:cNvGrpSpPr/>
+        <p:nvPr/>
+      </p:nvGrpSpPr>
+      <p:grpSpPr>
+        <a:xfrm>
+          <a:off x="0" y="0"/>
+          <a:ext cx="0" cy="0"/>
+          <a:chOff x="0" y="0"/>
+          <a:chExt cx="0" cy="0"/>
+        </a:xfrm>
+      </p:grpSpPr>
+      <p:sp>
+        <p:nvSpPr>
+          <p:cNvPr id="2" name="Slide Image Placeholder 1"/>
+          <p:cNvSpPr>
+            <a:spLocks noGrp="1" noRot="1" noChangeAspect="1"/>
+          </p:cNvSpPr>
+          <p:nvPr>
+            <p:ph type="sldImg"/>
+          </p:nvPr>
+        </p:nvSpPr>
+        <p:spPr/>
+      </p:sp>
+      <p:sp>
+        <p:nvSpPr>
+          <p:cNvPr id="3" name="Notes Placeholder 2"/>
+          <p:cNvSpPr>
+            <a:spLocks noGrp="1"/>
+          </p:cNvSpPr>
+          <p:nvPr>
+            <p:ph type="body" idx="1"/>
+          </p:nvPr>
+        </p:nvSpPr>
+        <p:spPr/>
+        <p:txBody>
+          <a:bodyPr/>
+          <a:lstStyle/>
+          <a:p>
+            <a:endParaRPr lang="zh-CN" dirty="0"/>
+          </a:p>
+        </p:txBody>
+      </p:sp>
+    </p:spTree>
+  </p:cSld>
+  <p:clrMapOvr>
+    <a:masterClrMapping/>
+  </p:clrMapOvr>
+</p:notes>
+</file>
+
+<file path=ppt/notesSlides/notesSlide7.xml><?xml version="1.0" encoding="utf-8"?>
+<p:notes xmlns:a="http://schemas.openxmlformats.org/drawingml/2006/main" xmlns:r="http://schemas.openxmlformats.org/officeDocument/2006/relationships" xmlns:p="http://schemas.openxmlformats.org/presentationml/2006/main">
+  <p:cSld>
+    <p:spTree>
+      <p:nvGrpSpPr>
+        <p:cNvPr id="1" name=""/>
+        <p:cNvGrpSpPr/>
+        <p:nvPr/>
+      </p:nvGrpSpPr>
+      <p:grpSpPr>
+        <a:xfrm>
+          <a:off x="0" y="0"/>
+          <a:ext cx="0" cy="0"/>
+          <a:chOff x="0" y="0"/>
+          <a:chExt cx="0" cy="0"/>
+        </a:xfrm>
+      </p:grpSpPr>
+      <p:sp>
+        <p:nvSpPr>
+          <p:cNvPr id="2" name="Slide Image Placeholder 1"/>
+          <p:cNvSpPr>
+            <a:spLocks noGrp="1" noRot="1" noChangeAspect="1"/>
+          </p:cNvSpPr>
+          <p:nvPr>
+            <p:ph type="sldImg"/>
+          </p:nvPr>
+        </p:nvSpPr>
+        <p:spPr/>
+      </p:sp>
+      <p:sp>
+        <p:nvSpPr>
+          <p:cNvPr id="3" name="Notes Placeholder 2"/>
+          <p:cNvSpPr>
+            <a:spLocks noGrp="1"/>
+          </p:cNvSpPr>
+          <p:nvPr>
+            <p:ph type="body" idx="1"/>
+          </p:nvPr>
+        </p:nvSpPr>
+        <p:spPr/>
+        <p:txBody>
+          <a:bodyPr/>
+          <a:lstStyle/>
+          <a:p>
+            <a:endParaRPr lang="zh-CN" dirty="0"/>
+          </a:p>
+        </p:txBody>
+      </p:sp>
+    </p:spTree>
+  </p:cSld>
+  <p:clrMapOvr>
+    <a:masterClrMapping/>
+  </p:clrMapOvr>
+</p:notes>
+</file>
+
+<file path=ppt/notesSlides/notesSlide8.xml><?xml version="1.0" encoding="utf-8"?>
+<p:notes xmlns:a="http://schemas.openxmlformats.org/drawingml/2006/main" xmlns:r="http://schemas.openxmlformats.org/officeDocument/2006/relationships" xmlns:p="http://schemas.openxmlformats.org/presentationml/2006/main">
+  <p:cSld>
+    <p:spTree>
+      <p:nvGrpSpPr>
+        <p:cNvPr id="1" name=""/>
+        <p:cNvGrpSpPr/>
+        <p:nvPr/>
+      </p:nvGrpSpPr>
+      <p:grpSpPr>
+        <a:xfrm>
+          <a:off x="0" y="0"/>
+          <a:ext cx="0" cy="0"/>
+          <a:chOff x="0" y="0"/>
+          <a:chExt cx="0" cy="0"/>
+        </a:xfrm>
+      </p:grpSpPr>
+      <p:sp>
+        <p:nvSpPr>
+          <p:cNvPr id="2" name="Slide Image Placeholder 1"/>
+          <p:cNvSpPr>
+            <a:spLocks noGrp="1" noRot="1" noChangeAspect="1"/>
+          </p:cNvSpPr>
+          <p:nvPr>
+            <p:ph type="sldImg"/>
+          </p:nvPr>
+        </p:nvSpPr>
+        <p:spPr/>
+      </p:sp>
+      <p:sp>
+        <p:nvSpPr>
+          <p:cNvPr id="3" name="Notes Placeholder 2"/>
+          <p:cNvSpPr>
+            <a:spLocks noGrp="1"/>
+          </p:cNvSpPr>
+          <p:nvPr>
+            <p:ph type="body" idx="1"/>
+          </p:nvPr>
+        </p:nvSpPr>
+        <p:spPr/>
+        <p:txBody>
+          <a:bodyPr/>
+          <a:lstStyle/>
+          <a:p>
+            <a:endParaRPr lang="zh-CN" dirty="0"/>
+          </a:p>
+        </p:txBody>
+      </p:sp>
+    </p:spTree>
+  </p:cSld>
+  <p:clrMapOvr>
+    <a:masterClrMapping/>
+  </p:clrMapOvr>
+</p:notes>
+</file>
+
+<file path=ppt/notesSlides/notesSlide9.xml><?xml version="1.0" encoding="utf-8"?>
+<p:notes xmlns:a="http://schemas.openxmlformats.org/drawingml/2006/main" xmlns:r="http://schemas.openxmlformats.org/officeDocument/2006/relationships" xmlns:p="http://schemas.openxmlformats.org/presentationml/2006/main">
+  <p:cSld>
+    <p:spTree>
+      <p:nvGrpSpPr>
+        <p:cNvPr id="1" name=""/>
+        <p:cNvGrpSpPr/>
+        <p:nvPr/>
+      </p:nvGrpSpPr>
+      <p:grpSpPr>
+        <a:xfrm>
+          <a:off x="0" y="0"/>
+          <a:ext cx="0" cy="0"/>
+          <a:chOff x="0" y="0"/>
+          <a:chExt cx="0" cy="0"/>
+        </a:xfrm>
+      </p:grpSpPr>
+      <p:sp>
+        <p:nvSpPr>
+          <p:cNvPr id="2" name="Slide Image Placeholder 1"/>
+          <p:cNvSpPr>
+            <a:spLocks noGrp="1" noRot="1" noChangeAspect="1"/>
+          </p:cNvSpPr>
+          <p:nvPr>
+            <p:ph type="sldImg"/>
+          </p:nvPr>
+        </p:nvSpPr>
+        <p:spPr/>
+      </p:sp>
+      <p:sp>
+        <p:nvSpPr>
+          <p:cNvPr id="3" name="Notes Placeholder 2"/>
+          <p:cNvSpPr>
+            <a:spLocks noGrp="1"/>
+          </p:cNvSpPr>
+          <p:nvPr>
+            <p:ph type="body" idx="1"/>
+          </p:nvPr>
+        </p:nvSpPr>
+        <p:spPr/>
+        <p:txBody>
+          <a:bodyPr/>
+          <a:lstStyle/>
+          <a:p>
+            <a:endParaRPr lang="zh-CN" dirty="0"/>
+          </a:p>
+        </p:txBody>
+      </p:sp>
+    </p:spTree>
+  </p:cSld>
+  <p:clrMapOvr>
+    <a:masterClrMapping/>
+  </p:clrMapOvr>
+</p:notes>
 </file>
 
 <file path=ppt/slideLayouts/slideLayout1.xml><?xml version="1.0" encoding="utf-8"?>

--- a/examples/ppt169_顶级咨询风_构建有效AI代理_Anthropic/ppt169_顶级咨询风_构建有效AI代理_Anthropic.pptx
+++ b/examples/ppt169_顶级咨询风_构建有效AI代理_Anthropic/ppt169_顶级咨询风_构建有效AI代理_Anthropic.pptx
@@ -3958,7 +3958,13 @@
           <p:nvPr/>
         </p:nvPicPr>
         <p:blipFill>
-          <a:blip r:embed="rId2"/>
+          <a:blip r:embed="rId2">
+            <a:extLst>
+              <a:ext uri="{96DAC541-7B7A-43D3-8B79-37D633B846F1}">
+                <asvg:svgBlip xmlns:asvg="http://schemas.microsoft.com/office/drawing/2016/SVG/main" r:embed="rId3"/>
+              </a:ext>
+            </a:extLst>
+          </a:blip>
           <a:stretch>
             <a:fillRect/>
           </a:stretch>
@@ -4007,7 +4013,13 @@
           <p:nvPr/>
         </p:nvPicPr>
         <p:blipFill>
-          <a:blip r:embed="rId2"/>
+          <a:blip r:embed="rId2">
+            <a:extLst>
+              <a:ext uri="{96DAC541-7B7A-43D3-8B79-37D633B846F1}">
+                <asvg:svgBlip xmlns:asvg="http://schemas.microsoft.com/office/drawing/2016/SVG/main" r:embed="rId3"/>
+              </a:ext>
+            </a:extLst>
+          </a:blip>
           <a:stretch>
             <a:fillRect/>
           </a:stretch>
@@ -4056,7 +4068,13 @@
           <p:nvPr/>
         </p:nvPicPr>
         <p:blipFill>
-          <a:blip r:embed="rId2"/>
+          <a:blip r:embed="rId2">
+            <a:extLst>
+              <a:ext uri="{96DAC541-7B7A-43D3-8B79-37D633B846F1}">
+                <asvg:svgBlip xmlns:asvg="http://schemas.microsoft.com/office/drawing/2016/SVG/main" r:embed="rId3"/>
+              </a:ext>
+            </a:extLst>
+          </a:blip>
           <a:stretch>
             <a:fillRect/>
           </a:stretch>
@@ -4105,7 +4123,13 @@
           <p:nvPr/>
         </p:nvPicPr>
         <p:blipFill>
-          <a:blip r:embed="rId2"/>
+          <a:blip r:embed="rId2">
+            <a:extLst>
+              <a:ext uri="{96DAC541-7B7A-43D3-8B79-37D633B846F1}">
+                <asvg:svgBlip xmlns:asvg="http://schemas.microsoft.com/office/drawing/2016/SVG/main" r:embed="rId3"/>
+              </a:ext>
+            </a:extLst>
+          </a:blip>
           <a:stretch>
             <a:fillRect/>
           </a:stretch>
@@ -4154,7 +4178,13 @@
           <p:nvPr/>
         </p:nvPicPr>
         <p:blipFill>
-          <a:blip r:embed="rId2"/>
+          <a:blip r:embed="rId2">
+            <a:extLst>
+              <a:ext uri="{96DAC541-7B7A-43D3-8B79-37D633B846F1}">
+                <asvg:svgBlip xmlns:asvg="http://schemas.microsoft.com/office/drawing/2016/SVG/main" r:embed="rId3"/>
+              </a:ext>
+            </a:extLst>
+          </a:blip>
           <a:stretch>
             <a:fillRect/>
           </a:stretch>
@@ -4203,7 +4233,13 @@
           <p:nvPr/>
         </p:nvPicPr>
         <p:blipFill>
-          <a:blip r:embed="rId2"/>
+          <a:blip r:embed="rId2">
+            <a:extLst>
+              <a:ext uri="{96DAC541-7B7A-43D3-8B79-37D633B846F1}">
+                <asvg:svgBlip xmlns:asvg="http://schemas.microsoft.com/office/drawing/2016/SVG/main" r:embed="rId3"/>
+              </a:ext>
+            </a:extLst>
+          </a:blip>
           <a:stretch>
             <a:fillRect/>
           </a:stretch>
@@ -4252,7 +4288,13 @@
           <p:nvPr/>
         </p:nvPicPr>
         <p:blipFill>
-          <a:blip r:embed="rId2"/>
+          <a:blip r:embed="rId2">
+            <a:extLst>
+              <a:ext uri="{96DAC541-7B7A-43D3-8B79-37D633B846F1}">
+                <asvg:svgBlip xmlns:asvg="http://schemas.microsoft.com/office/drawing/2016/SVG/main" r:embed="rId3"/>
+              </a:ext>
+            </a:extLst>
+          </a:blip>
           <a:stretch>
             <a:fillRect/>
           </a:stretch>
@@ -4301,7 +4343,13 @@
           <p:nvPr/>
         </p:nvPicPr>
         <p:blipFill>
-          <a:blip r:embed="rId2"/>
+          <a:blip r:embed="rId2">
+            <a:extLst>
+              <a:ext uri="{96DAC541-7B7A-43D3-8B79-37D633B846F1}">
+                <asvg:svgBlip xmlns:asvg="http://schemas.microsoft.com/office/drawing/2016/SVG/main" r:embed="rId3"/>
+              </a:ext>
+            </a:extLst>
+          </a:blip>
           <a:stretch>
             <a:fillRect/>
           </a:stretch>
@@ -4350,7 +4398,13 @@
           <p:nvPr/>
         </p:nvPicPr>
         <p:blipFill>
-          <a:blip r:embed="rId2"/>
+          <a:blip r:embed="rId2">
+            <a:extLst>
+              <a:ext uri="{96DAC541-7B7A-43D3-8B79-37D633B846F1}">
+                <asvg:svgBlip xmlns:asvg="http://schemas.microsoft.com/office/drawing/2016/SVG/main" r:embed="rId3"/>
+              </a:ext>
+            </a:extLst>
+          </a:blip>
           <a:stretch>
             <a:fillRect/>
           </a:stretch>
@@ -4399,7 +4453,13 @@
           <p:nvPr/>
         </p:nvPicPr>
         <p:blipFill>
-          <a:blip r:embed="rId2"/>
+          <a:blip r:embed="rId2">
+            <a:extLst>
+              <a:ext uri="{96DAC541-7B7A-43D3-8B79-37D633B846F1}">
+                <asvg:svgBlip xmlns:asvg="http://schemas.microsoft.com/office/drawing/2016/SVG/main" r:embed="rId3"/>
+              </a:ext>
+            </a:extLst>
+          </a:blip>
           <a:stretch>
             <a:fillRect/>
           </a:stretch>
@@ -4448,7 +4508,13 @@
           <p:nvPr/>
         </p:nvPicPr>
         <p:blipFill>
-          <a:blip r:embed="rId2"/>
+          <a:blip r:embed="rId2">
+            <a:extLst>
+              <a:ext uri="{96DAC541-7B7A-43D3-8B79-37D633B846F1}">
+                <asvg:svgBlip xmlns:asvg="http://schemas.microsoft.com/office/drawing/2016/SVG/main" r:embed="rId3"/>
+              </a:ext>
+            </a:extLst>
+          </a:blip>
           <a:stretch>
             <a:fillRect/>
           </a:stretch>
@@ -4497,7 +4563,13 @@
           <p:nvPr/>
         </p:nvPicPr>
         <p:blipFill>
-          <a:blip r:embed="rId2"/>
+          <a:blip r:embed="rId2">
+            <a:extLst>
+              <a:ext uri="{96DAC541-7B7A-43D3-8B79-37D633B846F1}">
+                <asvg:svgBlip xmlns:asvg="http://schemas.microsoft.com/office/drawing/2016/SVG/main" r:embed="rId3"/>
+              </a:ext>
+            </a:extLst>
+          </a:blip>
           <a:stretch>
             <a:fillRect/>
           </a:stretch>
@@ -4546,7 +4618,13 @@
           <p:nvPr/>
         </p:nvPicPr>
         <p:blipFill>
-          <a:blip r:embed="rId2"/>
+          <a:blip r:embed="rId2">
+            <a:extLst>
+              <a:ext uri="{96DAC541-7B7A-43D3-8B79-37D633B846F1}">
+                <asvg:svgBlip xmlns:asvg="http://schemas.microsoft.com/office/drawing/2016/SVG/main" r:embed="rId3"/>
+              </a:ext>
+            </a:extLst>
+          </a:blip>
           <a:stretch>
             <a:fillRect/>
           </a:stretch>
@@ -4595,7 +4673,13 @@
           <p:nvPr/>
         </p:nvPicPr>
         <p:blipFill>
-          <a:blip r:embed="rId2"/>
+          <a:blip r:embed="rId2">
+            <a:extLst>
+              <a:ext uri="{96DAC541-7B7A-43D3-8B79-37D633B846F1}">
+                <asvg:svgBlip xmlns:asvg="http://schemas.microsoft.com/office/drawing/2016/SVG/main" r:embed="rId3"/>
+              </a:ext>
+            </a:extLst>
+          </a:blip>
           <a:stretch>
             <a:fillRect/>
           </a:stretch>
@@ -4644,7 +4728,13 @@
           <p:nvPr/>
         </p:nvPicPr>
         <p:blipFill>
-          <a:blip r:embed="rId2"/>
+          <a:blip r:embed="rId2">
+            <a:extLst>
+              <a:ext uri="{96DAC541-7B7A-43D3-8B79-37D633B846F1}">
+                <asvg:svgBlip xmlns:asvg="http://schemas.microsoft.com/office/drawing/2016/SVG/main" r:embed="rId3"/>
+              </a:ext>
+            </a:extLst>
+          </a:blip>
           <a:stretch>
             <a:fillRect/>
           </a:stretch>
